--- a/deck/AI_Cost_Window_Slides.pptx
+++ b/deck/AI_Cost_Window_Slides.pptx
@@ -1637,7 +1637,7 @@
         <p:spPr>
           <a:xfrm>
             <a:off x="8321040" y="493776"/>
-            <a:ext cx="3413455" cy="658368"/>
+            <a:ext cx="3413455" cy="731520"/>
           </a:xfrm>
           <a:prstGeom prst="rect">
             <a:avLst/>
@@ -2844,7 +2844,7 @@
         <p:spPr>
           <a:xfrm>
             <a:off x="8321040" y="493776"/>
-            <a:ext cx="3413455" cy="658368"/>
+            <a:ext cx="3413455" cy="731520"/>
           </a:xfrm>
           <a:prstGeom prst="rect">
             <a:avLst/>
